--- a/make_presentation/templates/templates/creative/no_logo_6.pptx
+++ b/make_presentation/templates/templates/creative/no_logo_6.pptx
@@ -72,13 +72,7 @@
               <a:rPr b="0" lang="en-US" sz="4400" spc="-1" strike="noStrike">
                 <a:latin typeface="Arial"/>
               </a:rPr>
-              <a:t>Click to move </a:t>
-            </a:r>
-            <a:r>
-              <a:rPr b="0" lang="en-US" sz="4400" spc="-1" strike="noStrike">
-                <a:latin typeface="Arial"/>
-              </a:rPr>
-              <a:t>the slide</a:t>
+              <a:t>Click to move the slide</a:t>
             </a:r>
             <a:endParaRPr b="0" lang="en-US" sz="4400" spc="-1" strike="noStrike">
               <a:latin typeface="Arial"/>
@@ -303,7 +297,7 @@
             <a:pPr algn="r">
               <a:buNone/>
             </a:pPr>
-            <a:fld id="{C3C0A304-4DBD-461A-81B7-BF9B03C344E3}" type="slidenum">
+            <a:fld id="{074A0D40-F38B-4493-B968-6A82C700DBB3}" type="slidenum">
               <a:rPr b="0" lang="en-US" sz="1400" spc="-1" strike="noStrike">
                 <a:latin typeface="Times New Roman"/>
               </a:rPr>
@@ -351,7 +345,7 @@
         <p:spPr>
           <a:xfrm>
             <a:off x="685800" y="1143000"/>
-            <a:ext cx="5485680" cy="3085560"/>
+            <a:ext cx="5485320" cy="3085200"/>
           </a:xfrm>
           <a:prstGeom prst="rect">
             <a:avLst/>
@@ -374,7 +368,7 @@
         <p:spPr>
           <a:xfrm>
             <a:off x="685800" y="4400640"/>
-            <a:ext cx="5485680" cy="3599640"/>
+            <a:ext cx="5485320" cy="3599280"/>
           </a:xfrm>
           <a:prstGeom prst="rect">
             <a:avLst/>
@@ -408,7 +402,7 @@
         <p:spPr>
           <a:xfrm>
             <a:off x="3884760" y="8685360"/>
-            <a:ext cx="2971080" cy="457920"/>
+            <a:ext cx="2970720" cy="457560"/>
           </a:xfrm>
           <a:prstGeom prst="rect">
             <a:avLst/>
@@ -440,7 +434,7 @@
               </a:lnSpc>
               <a:buNone/>
             </a:pPr>
-            <a:fld id="{85620DEE-A578-416D-8A53-59CF847A3345}" type="slidenum">
+            <a:fld id="{9F9486C7-037D-4906-9B64-BC1293374537}" type="slidenum">
               <a:rPr b="0" lang="ru-RU" sz="1200" spc="-1" strike="noStrike">
                 <a:latin typeface="Times New Roman"/>
               </a:rPr>
@@ -487,7 +481,7 @@
         <p:spPr>
           <a:xfrm>
             <a:off x="685800" y="1143000"/>
-            <a:ext cx="5485680" cy="3085560"/>
+            <a:ext cx="5485320" cy="3085200"/>
           </a:xfrm>
           <a:prstGeom prst="rect">
             <a:avLst/>
@@ -510,7 +504,7 @@
         <p:spPr>
           <a:xfrm>
             <a:off x="685800" y="4400640"/>
-            <a:ext cx="5485680" cy="3599640"/>
+            <a:ext cx="5485320" cy="3599280"/>
           </a:xfrm>
           <a:prstGeom prst="rect">
             <a:avLst/>
@@ -544,7 +538,7 @@
         <p:spPr>
           <a:xfrm>
             <a:off x="3884760" y="8685360"/>
-            <a:ext cx="2971080" cy="457920"/>
+            <a:ext cx="2970720" cy="457560"/>
           </a:xfrm>
           <a:prstGeom prst="rect">
             <a:avLst/>
@@ -576,7 +570,7 @@
               </a:lnSpc>
               <a:buNone/>
             </a:pPr>
-            <a:fld id="{BEB52EB0-0FBF-43E8-8F06-9C397C4672FA}" type="slidenum">
+            <a:fld id="{10CAC3CE-2EC6-4904-8F78-DB3C5730A526}" type="slidenum">
               <a:rPr b="0" lang="ru-RU" sz="1200" spc="-1" strike="noStrike">
                 <a:latin typeface="Times New Roman"/>
               </a:rPr>
@@ -644,7 +638,7 @@
         <p:txBody>
           <a:bodyPr/>
           <a:p>
-            <a:fld id="{EA748053-77C6-4F66-9228-8E9146782808}" type="slidenum">
+            <a:fld id="{C086AE43-7FBA-4308-AB35-80FDB5BC5319}" type="slidenum">
               <a:t>&lt;#&gt;</a:t>
             </a:fld>
           </a:p>
@@ -706,7 +700,7 @@
         <p:spPr>
           <a:xfrm>
             <a:off x="1143000" y="841680"/>
-            <a:ext cx="6857280" cy="1789920"/>
+            <a:ext cx="6856920" cy="1789560"/>
           </a:xfrm>
           <a:prstGeom prst="rect">
             <a:avLst/>
@@ -743,7 +737,7 @@
         <p:spPr>
           <a:xfrm>
             <a:off x="457200" y="1203480"/>
-            <a:ext cx="8229240" cy="1422720"/>
+            <a:ext cx="8228880" cy="1422360"/>
           </a:xfrm>
           <a:prstGeom prst="rect">
             <a:avLst/>
@@ -776,8 +770,8 @@
         </p:nvSpPr>
         <p:spPr>
           <a:xfrm>
-            <a:off x="457200" y="2761920"/>
-            <a:ext cx="8229240" cy="1422720"/>
+            <a:off x="457200" y="2761200"/>
+            <a:ext cx="8228880" cy="1422360"/>
           </a:xfrm>
           <a:prstGeom prst="rect">
             <a:avLst/>
@@ -832,7 +826,7 @@
         <p:txBody>
           <a:bodyPr/>
           <a:p>
-            <a:fld id="{C05D5EA8-71A7-403F-B2B7-003126B48FF3}" type="slidenum">
+            <a:fld id="{4F5B0841-14AB-4FAC-9CAE-AC9550C96F00}" type="slidenum">
               <a:t>&lt;#&gt;</a:t>
             </a:fld>
           </a:p>
@@ -894,7 +888,7 @@
         <p:spPr>
           <a:xfrm>
             <a:off x="1143000" y="841680"/>
-            <a:ext cx="6857280" cy="1789920"/>
+            <a:ext cx="6856920" cy="1789560"/>
           </a:xfrm>
           <a:prstGeom prst="rect">
             <a:avLst/>
@@ -931,7 +925,7 @@
         <p:spPr>
           <a:xfrm>
             <a:off x="457200" y="1203480"/>
-            <a:ext cx="4015800" cy="1422720"/>
+            <a:ext cx="4015440" cy="1422360"/>
           </a:xfrm>
           <a:prstGeom prst="rect">
             <a:avLst/>
@@ -964,8 +958,8 @@
         </p:nvSpPr>
         <p:spPr>
           <a:xfrm>
-            <a:off x="4674240" y="1203480"/>
-            <a:ext cx="4015800" cy="1422720"/>
+            <a:off x="4673880" y="1203480"/>
+            <a:ext cx="4015440" cy="1422360"/>
           </a:xfrm>
           <a:prstGeom prst="rect">
             <a:avLst/>
@@ -998,8 +992,8 @@
         </p:nvSpPr>
         <p:spPr>
           <a:xfrm>
-            <a:off x="457200" y="2761920"/>
-            <a:ext cx="4015800" cy="1422720"/>
+            <a:off x="457200" y="2761200"/>
+            <a:ext cx="4015440" cy="1422360"/>
           </a:xfrm>
           <a:prstGeom prst="rect">
             <a:avLst/>
@@ -1032,8 +1026,8 @@
         </p:nvSpPr>
         <p:spPr>
           <a:xfrm>
-            <a:off x="4674240" y="2761920"/>
-            <a:ext cx="4015800" cy="1422720"/>
+            <a:off x="4673880" y="2761200"/>
+            <a:ext cx="4015440" cy="1422360"/>
           </a:xfrm>
           <a:prstGeom prst="rect">
             <a:avLst/>
@@ -1088,7 +1082,7 @@
         <p:txBody>
           <a:bodyPr/>
           <a:p>
-            <a:fld id="{333236D5-2C90-4241-9277-05A2B3891100}" type="slidenum">
+            <a:fld id="{2BAE7FDF-91C5-416C-9382-C117627FAB4A}" type="slidenum">
               <a:t>&lt;#&gt;</a:t>
             </a:fld>
           </a:p>
@@ -1150,7 +1144,7 @@
         <p:spPr>
           <a:xfrm>
             <a:off x="1143000" y="841680"/>
-            <a:ext cx="6857280" cy="1789920"/>
+            <a:ext cx="6856920" cy="1789560"/>
           </a:xfrm>
           <a:prstGeom prst="rect">
             <a:avLst/>
@@ -1187,7 +1181,7 @@
         <p:spPr>
           <a:xfrm>
             <a:off x="457200" y="1203480"/>
-            <a:ext cx="2649600" cy="1422720"/>
+            <a:ext cx="2649600" cy="1422360"/>
           </a:xfrm>
           <a:prstGeom prst="rect">
             <a:avLst/>
@@ -1221,7 +1215,7 @@
         <p:spPr>
           <a:xfrm>
             <a:off x="3239640" y="1203480"/>
-            <a:ext cx="2649600" cy="1422720"/>
+            <a:ext cx="2649600" cy="1422360"/>
           </a:xfrm>
           <a:prstGeom prst="rect">
             <a:avLst/>
@@ -1255,7 +1249,7 @@
         <p:spPr>
           <a:xfrm>
             <a:off x="6022080" y="1203480"/>
-            <a:ext cx="2649600" cy="1422720"/>
+            <a:ext cx="2649600" cy="1422360"/>
           </a:xfrm>
           <a:prstGeom prst="rect">
             <a:avLst/>
@@ -1288,8 +1282,8 @@
         </p:nvSpPr>
         <p:spPr>
           <a:xfrm>
-            <a:off x="457200" y="2761920"/>
-            <a:ext cx="2649600" cy="1422720"/>
+            <a:off x="457200" y="2761200"/>
+            <a:ext cx="2649600" cy="1422360"/>
           </a:xfrm>
           <a:prstGeom prst="rect">
             <a:avLst/>
@@ -1322,8 +1316,8 @@
         </p:nvSpPr>
         <p:spPr>
           <a:xfrm>
-            <a:off x="3239640" y="2761920"/>
-            <a:ext cx="2649600" cy="1422720"/>
+            <a:off x="3239640" y="2761200"/>
+            <a:ext cx="2649600" cy="1422360"/>
           </a:xfrm>
           <a:prstGeom prst="rect">
             <a:avLst/>
@@ -1356,8 +1350,8 @@
         </p:nvSpPr>
         <p:spPr>
           <a:xfrm>
-            <a:off x="6022080" y="2761920"/>
-            <a:ext cx="2649600" cy="1422720"/>
+            <a:off x="6022080" y="2761200"/>
+            <a:ext cx="2649600" cy="1422360"/>
           </a:xfrm>
           <a:prstGeom prst="rect">
             <a:avLst/>
@@ -1412,7 +1406,7 @@
         <p:txBody>
           <a:bodyPr/>
           <a:p>
-            <a:fld id="{11946927-3F35-420B-B90D-F43C221351C4}" type="slidenum">
+            <a:fld id="{8C657887-AD7D-4903-862F-CA03DD678734}" type="slidenum">
               <a:t>&lt;#&gt;</a:t>
             </a:fld>
           </a:p>
@@ -1474,7 +1468,7 @@
         <p:spPr>
           <a:xfrm>
             <a:off x="1143000" y="841680"/>
-            <a:ext cx="6857280" cy="1789920"/>
+            <a:ext cx="6856920" cy="1789560"/>
           </a:xfrm>
           <a:prstGeom prst="rect">
             <a:avLst/>
@@ -1511,7 +1505,7 @@
         <p:spPr>
           <a:xfrm>
             <a:off x="457200" y="1203480"/>
-            <a:ext cx="8229240" cy="2982960"/>
+            <a:ext cx="8228880" cy="2982600"/>
           </a:xfrm>
           <a:prstGeom prst="rect">
             <a:avLst/>
@@ -1569,7 +1563,7 @@
         <p:txBody>
           <a:bodyPr/>
           <a:p>
-            <a:fld id="{91242503-FEAE-4D7D-A273-C1B82CC71106}" type="slidenum">
+            <a:fld id="{1DB9EE8B-CFA5-4684-BA3A-9680DBDCA636}" type="slidenum">
               <a:t>&lt;#&gt;</a:t>
             </a:fld>
           </a:p>
@@ -1631,7 +1625,7 @@
         <p:spPr>
           <a:xfrm>
             <a:off x="1143000" y="841680"/>
-            <a:ext cx="6857280" cy="1789920"/>
+            <a:ext cx="6856920" cy="1789560"/>
           </a:xfrm>
           <a:prstGeom prst="rect">
             <a:avLst/>
@@ -1668,7 +1662,7 @@
         <p:spPr>
           <a:xfrm>
             <a:off x="457200" y="1203480"/>
-            <a:ext cx="8229240" cy="2982960"/>
+            <a:ext cx="8228880" cy="2982600"/>
           </a:xfrm>
           <a:prstGeom prst="rect">
             <a:avLst/>
@@ -1723,7 +1717,7 @@
         <p:txBody>
           <a:bodyPr/>
           <a:p>
-            <a:fld id="{337C8E65-F92B-48EE-AB93-A067C833EAAA}" type="slidenum">
+            <a:fld id="{99727F01-66E3-417E-BA73-8D8846F7A9EC}" type="slidenum">
               <a:t>&lt;#&gt;</a:t>
             </a:fld>
           </a:p>
@@ -1785,7 +1779,7 @@
         <p:spPr>
           <a:xfrm>
             <a:off x="1143000" y="841680"/>
-            <a:ext cx="6857280" cy="1789920"/>
+            <a:ext cx="6856920" cy="1789560"/>
           </a:xfrm>
           <a:prstGeom prst="rect">
             <a:avLst/>
@@ -1822,7 +1816,7 @@
         <p:spPr>
           <a:xfrm>
             <a:off x="457200" y="1203480"/>
-            <a:ext cx="4015800" cy="2982960"/>
+            <a:ext cx="4015440" cy="2982600"/>
           </a:xfrm>
           <a:prstGeom prst="rect">
             <a:avLst/>
@@ -1855,8 +1849,8 @@
         </p:nvSpPr>
         <p:spPr>
           <a:xfrm>
-            <a:off x="4674240" y="1203480"/>
-            <a:ext cx="4015800" cy="2982960"/>
+            <a:off x="4673880" y="1203480"/>
+            <a:ext cx="4015440" cy="2982600"/>
           </a:xfrm>
           <a:prstGeom prst="rect">
             <a:avLst/>
@@ -1911,7 +1905,7 @@
         <p:txBody>
           <a:bodyPr/>
           <a:p>
-            <a:fld id="{BA4BA99A-1A58-4FBB-A5C8-BDED5A0FE58C}" type="slidenum">
+            <a:fld id="{7D8C181C-F00A-465D-AF72-0A987ECAF8C3}" type="slidenum">
               <a:t>&lt;#&gt;</a:t>
             </a:fld>
           </a:p>
@@ -1973,7 +1967,7 @@
         <p:spPr>
           <a:xfrm>
             <a:off x="1143000" y="841680"/>
-            <a:ext cx="6857280" cy="1789920"/>
+            <a:ext cx="6856920" cy="1789560"/>
           </a:xfrm>
           <a:prstGeom prst="rect">
             <a:avLst/>
@@ -2031,7 +2025,7 @@
         <p:txBody>
           <a:bodyPr/>
           <a:p>
-            <a:fld id="{EAAB8878-C0E8-4D01-92A7-9ADEA0869456}" type="slidenum">
+            <a:fld id="{7CFC8EC6-781B-48FE-92EF-8F115F293D7E}" type="slidenum">
               <a:t>&lt;#&gt;</a:t>
             </a:fld>
           </a:p>
@@ -2093,7 +2087,7 @@
         <p:spPr>
           <a:xfrm>
             <a:off x="1143000" y="841680"/>
-            <a:ext cx="6857280" cy="8298360"/>
+            <a:ext cx="6856920" cy="8296560"/>
           </a:xfrm>
           <a:prstGeom prst="rect">
             <a:avLst/>
@@ -2151,7 +2145,7 @@
         <p:txBody>
           <a:bodyPr/>
           <a:p>
-            <a:fld id="{F8F84972-EB29-4EBC-9050-244630A8E187}" type="slidenum">
+            <a:fld id="{26F8364E-87C3-4C70-91D3-E7E699184338}" type="slidenum">
               <a:t>&lt;#&gt;</a:t>
             </a:fld>
           </a:p>
@@ -2213,7 +2207,7 @@
         <p:spPr>
           <a:xfrm>
             <a:off x="1143000" y="841680"/>
-            <a:ext cx="6857280" cy="1789920"/>
+            <a:ext cx="6856920" cy="1789560"/>
           </a:xfrm>
           <a:prstGeom prst="rect">
             <a:avLst/>
@@ -2250,7 +2244,7 @@
         <p:spPr>
           <a:xfrm>
             <a:off x="457200" y="1203480"/>
-            <a:ext cx="4015800" cy="1422720"/>
+            <a:ext cx="4015440" cy="1422360"/>
           </a:xfrm>
           <a:prstGeom prst="rect">
             <a:avLst/>
@@ -2283,8 +2277,8 @@
         </p:nvSpPr>
         <p:spPr>
           <a:xfrm>
-            <a:off x="4674240" y="1203480"/>
-            <a:ext cx="4015800" cy="2982960"/>
+            <a:off x="4673880" y="1203480"/>
+            <a:ext cx="4015440" cy="2982600"/>
           </a:xfrm>
           <a:prstGeom prst="rect">
             <a:avLst/>
@@ -2317,8 +2311,8 @@
         </p:nvSpPr>
         <p:spPr>
           <a:xfrm>
-            <a:off x="457200" y="2761920"/>
-            <a:ext cx="4015800" cy="1422720"/>
+            <a:off x="457200" y="2761200"/>
+            <a:ext cx="4015440" cy="1422360"/>
           </a:xfrm>
           <a:prstGeom prst="rect">
             <a:avLst/>
@@ -2373,7 +2367,7 @@
         <p:txBody>
           <a:bodyPr/>
           <a:p>
-            <a:fld id="{983E1FC0-4DFD-41CE-8E8D-60C87212E98D}" type="slidenum">
+            <a:fld id="{4CFC59FD-0BED-4F9C-9951-20D4893E6A06}" type="slidenum">
               <a:t>&lt;#&gt;</a:t>
             </a:fld>
           </a:p>
@@ -2435,7 +2429,7 @@
         <p:spPr>
           <a:xfrm>
             <a:off x="1143000" y="841680"/>
-            <a:ext cx="6857280" cy="1789920"/>
+            <a:ext cx="6856920" cy="1789560"/>
           </a:xfrm>
           <a:prstGeom prst="rect">
             <a:avLst/>
@@ -2472,7 +2466,7 @@
         <p:spPr>
           <a:xfrm>
             <a:off x="457200" y="1203480"/>
-            <a:ext cx="4015800" cy="2982960"/>
+            <a:ext cx="4015440" cy="2982600"/>
           </a:xfrm>
           <a:prstGeom prst="rect">
             <a:avLst/>
@@ -2505,8 +2499,8 @@
         </p:nvSpPr>
         <p:spPr>
           <a:xfrm>
-            <a:off x="4674240" y="1203480"/>
-            <a:ext cx="4015800" cy="1422720"/>
+            <a:off x="4673880" y="1203480"/>
+            <a:ext cx="4015440" cy="1422360"/>
           </a:xfrm>
           <a:prstGeom prst="rect">
             <a:avLst/>
@@ -2539,8 +2533,8 @@
         </p:nvSpPr>
         <p:spPr>
           <a:xfrm>
-            <a:off x="4674240" y="2761920"/>
-            <a:ext cx="4015800" cy="1422720"/>
+            <a:off x="4673880" y="2761200"/>
+            <a:ext cx="4015440" cy="1422360"/>
           </a:xfrm>
           <a:prstGeom prst="rect">
             <a:avLst/>
@@ -2595,7 +2589,7 @@
         <p:txBody>
           <a:bodyPr/>
           <a:p>
-            <a:fld id="{4CE1C019-BB1C-4391-A07B-2F9C79CDD451}" type="slidenum">
+            <a:fld id="{1D5A5E9D-83F8-4646-8040-FF2C135E2921}" type="slidenum">
               <a:t>&lt;#&gt;</a:t>
             </a:fld>
           </a:p>
@@ -2657,7 +2651,7 @@
         <p:spPr>
           <a:xfrm>
             <a:off x="1143000" y="841680"/>
-            <a:ext cx="6857280" cy="1789920"/>
+            <a:ext cx="6856920" cy="1789560"/>
           </a:xfrm>
           <a:prstGeom prst="rect">
             <a:avLst/>
@@ -2694,7 +2688,7 @@
         <p:spPr>
           <a:xfrm>
             <a:off x="457200" y="1203480"/>
-            <a:ext cx="4015800" cy="1422720"/>
+            <a:ext cx="4015440" cy="1422360"/>
           </a:xfrm>
           <a:prstGeom prst="rect">
             <a:avLst/>
@@ -2727,8 +2721,8 @@
         </p:nvSpPr>
         <p:spPr>
           <a:xfrm>
-            <a:off x="4674240" y="1203480"/>
-            <a:ext cx="4015800" cy="1422720"/>
+            <a:off x="4673880" y="1203480"/>
+            <a:ext cx="4015440" cy="1422360"/>
           </a:xfrm>
           <a:prstGeom prst="rect">
             <a:avLst/>
@@ -2761,8 +2755,8 @@
         </p:nvSpPr>
         <p:spPr>
           <a:xfrm>
-            <a:off x="457200" y="2761920"/>
-            <a:ext cx="8229240" cy="1422720"/>
+            <a:off x="457200" y="2761200"/>
+            <a:ext cx="8228880" cy="1422360"/>
           </a:xfrm>
           <a:prstGeom prst="rect">
             <a:avLst/>
@@ -2817,7 +2811,7 @@
         <p:txBody>
           <a:bodyPr/>
           <a:p>
-            <a:fld id="{26980AA9-B349-4718-B19B-B9F95AF904E1}" type="slidenum">
+            <a:fld id="{E2B8393E-B3D2-47FB-8316-C1B4942CC669}" type="slidenum">
               <a:t>&lt;#&gt;</a:t>
             </a:fld>
           </a:p>
@@ -2886,7 +2880,7 @@
         <p:spPr>
           <a:xfrm>
             <a:off x="1143000" y="841680"/>
-            <a:ext cx="6857280" cy="1789920"/>
+            <a:ext cx="6856920" cy="1789560"/>
           </a:xfrm>
           <a:prstGeom prst="rect">
             <a:avLst/>
@@ -2905,85 +2899,190 @@
               <a:rPr b="0" lang="en-US" sz="1800" spc="-1" strike="noStrike">
                 <a:latin typeface="Arial"/>
               </a:rPr>
-              <a:t>Cli</a:t>
-            </a:r>
+              <a:t>Click to edit the title text format</a:t>
+            </a:r>
+            <a:endParaRPr b="0" lang="en-US" sz="1800" spc="-1" strike="noStrike">
+              <a:latin typeface="Arial"/>
+            </a:endParaRPr>
+          </a:p>
+        </p:txBody>
+      </p:sp>
+      <p:sp>
+        <p:nvSpPr>
+          <p:cNvPr id="1" name="PlaceHolder 2"/>
+          <p:cNvSpPr>
+            <a:spLocks noGrp="1"/>
+          </p:cNvSpPr>
+          <p:nvPr>
+            <p:ph type="body"/>
+          </p:nvPr>
+        </p:nvSpPr>
+        <p:spPr>
+          <a:xfrm>
+            <a:off x="457200" y="1203480"/>
+            <a:ext cx="8228880" cy="2982600"/>
+          </a:xfrm>
+          <a:prstGeom prst="rect">
+            <a:avLst/>
+          </a:prstGeom>
+          <a:noFill/>
+          <a:ln w="0">
+            <a:noFill/>
+          </a:ln>
+        </p:spPr>
+        <p:txBody>
+          <a:bodyPr lIns="0" rIns="0" tIns="0" bIns="0" anchor="t">
+            <a:normAutofit/>
+          </a:bodyPr>
+          <a:p>
+            <a:pPr marL="432000" indent="-324000">
+              <a:spcBef>
+                <a:spcPts val="1417"/>
+              </a:spcBef>
+              <a:buClr>
+                <a:srgbClr val="000000"/>
+              </a:buClr>
+              <a:buSzPct val="45000"/>
+              <a:buFont typeface="Wingdings" charset="2"/>
+              <a:buChar char=""/>
+            </a:pPr>
             <a:r>
               <a:rPr b="0" lang="en-US" sz="1800" spc="-1" strike="noStrike">
                 <a:latin typeface="Arial"/>
               </a:rPr>
-              <a:t>ck </a:t>
-            </a:r>
+              <a:t>Click to edit the outline text format</a:t>
+            </a:r>
+            <a:endParaRPr b="0" lang="en-US" sz="1800" spc="-1" strike="noStrike">
+              <a:latin typeface="Arial"/>
+            </a:endParaRPr>
+          </a:p>
+          <a:p>
+            <a:pPr lvl="1" marL="864000" indent="-324000">
+              <a:spcBef>
+                <a:spcPts val="1134"/>
+              </a:spcBef>
+              <a:buClr>
+                <a:srgbClr val="000000"/>
+              </a:buClr>
+              <a:buSzPct val="75000"/>
+              <a:buFont typeface="Symbol" charset="2"/>
+              <a:buChar char=""/>
+            </a:pPr>
             <a:r>
               <a:rPr b="0" lang="en-US" sz="1800" spc="-1" strike="noStrike">
                 <a:latin typeface="Arial"/>
               </a:rPr>
-              <a:t>to </a:t>
-            </a:r>
+              <a:t>Second Outline Level</a:t>
+            </a:r>
+            <a:endParaRPr b="0" lang="en-US" sz="1800" spc="-1" strike="noStrike">
+              <a:latin typeface="Arial"/>
+            </a:endParaRPr>
+          </a:p>
+          <a:p>
+            <a:pPr lvl="2" marL="1296000" indent="-288000">
+              <a:spcBef>
+                <a:spcPts val="850"/>
+              </a:spcBef>
+              <a:buClr>
+                <a:srgbClr val="000000"/>
+              </a:buClr>
+              <a:buSzPct val="45000"/>
+              <a:buFont typeface="Wingdings" charset="2"/>
+              <a:buChar char=""/>
+            </a:pPr>
             <a:r>
               <a:rPr b="0" lang="en-US" sz="1800" spc="-1" strike="noStrike">
                 <a:latin typeface="Arial"/>
               </a:rPr>
-              <a:t>edi</a:t>
-            </a:r>
+              <a:t>Third Outline Level</a:t>
+            </a:r>
+            <a:endParaRPr b="0" lang="en-US" sz="1800" spc="-1" strike="noStrike">
+              <a:latin typeface="Arial"/>
+            </a:endParaRPr>
+          </a:p>
+          <a:p>
+            <a:pPr lvl="3" marL="1728000" indent="-216000">
+              <a:spcBef>
+                <a:spcPts val="567"/>
+              </a:spcBef>
+              <a:buClr>
+                <a:srgbClr val="000000"/>
+              </a:buClr>
+              <a:buSzPct val="75000"/>
+              <a:buFont typeface="Symbol" charset="2"/>
+              <a:buChar char=""/>
+            </a:pPr>
             <a:r>
               <a:rPr b="0" lang="en-US" sz="1800" spc="-1" strike="noStrike">
                 <a:latin typeface="Arial"/>
               </a:rPr>
-              <a:t>t </a:t>
-            </a:r>
+              <a:t>Fourth Outline Level</a:t>
+            </a:r>
+            <a:endParaRPr b="0" lang="en-US" sz="1800" spc="-1" strike="noStrike">
+              <a:latin typeface="Arial"/>
+            </a:endParaRPr>
+          </a:p>
+          <a:p>
+            <a:pPr lvl="4" marL="2160000" indent="-216000">
+              <a:spcBef>
+                <a:spcPts val="283"/>
+              </a:spcBef>
+              <a:buClr>
+                <a:srgbClr val="000000"/>
+              </a:buClr>
+              <a:buSzPct val="45000"/>
+              <a:buFont typeface="Wingdings" charset="2"/>
+              <a:buChar char=""/>
+            </a:pPr>
             <a:r>
               <a:rPr b="0" lang="en-US" sz="1800" spc="-1" strike="noStrike">
                 <a:latin typeface="Arial"/>
               </a:rPr>
-              <a:t>th</a:t>
-            </a:r>
+              <a:t>Fifth Outline Level</a:t>
+            </a:r>
+            <a:endParaRPr b="0" lang="en-US" sz="1800" spc="-1" strike="noStrike">
+              <a:latin typeface="Arial"/>
+            </a:endParaRPr>
+          </a:p>
+          <a:p>
+            <a:pPr lvl="5" marL="2592000" indent="-216000">
+              <a:spcBef>
+                <a:spcPts val="283"/>
+              </a:spcBef>
+              <a:buClr>
+                <a:srgbClr val="000000"/>
+              </a:buClr>
+              <a:buSzPct val="45000"/>
+              <a:buFont typeface="Wingdings" charset="2"/>
+              <a:buChar char=""/>
+            </a:pPr>
             <a:r>
               <a:rPr b="0" lang="en-US" sz="1800" spc="-1" strike="noStrike">
                 <a:latin typeface="Arial"/>
               </a:rPr>
-              <a:t>e </a:t>
-            </a:r>
+              <a:t>Sixth Outline Level</a:t>
+            </a:r>
+            <a:endParaRPr b="0" lang="en-US" sz="1800" spc="-1" strike="noStrike">
+              <a:latin typeface="Arial"/>
+            </a:endParaRPr>
+          </a:p>
+          <a:p>
+            <a:pPr lvl="6" marL="3024000" indent="-216000">
+              <a:spcBef>
+                <a:spcPts val="283"/>
+              </a:spcBef>
+              <a:buClr>
+                <a:srgbClr val="000000"/>
+              </a:buClr>
+              <a:buSzPct val="45000"/>
+              <a:buFont typeface="Wingdings" charset="2"/>
+              <a:buChar char=""/>
+            </a:pPr>
             <a:r>
               <a:rPr b="0" lang="en-US" sz="1800" spc="-1" strike="noStrike">
                 <a:latin typeface="Arial"/>
               </a:rPr>
-              <a:t>titl</a:t>
-            </a:r>
-            <a:r>
-              <a:rPr b="0" lang="en-US" sz="1800" spc="-1" strike="noStrike">
-                <a:latin typeface="Arial"/>
-              </a:rPr>
-              <a:t>e </a:t>
-            </a:r>
-            <a:r>
-              <a:rPr b="0" lang="en-US" sz="1800" spc="-1" strike="noStrike">
-                <a:latin typeface="Arial"/>
-              </a:rPr>
-              <a:t>tex</a:t>
-            </a:r>
-            <a:r>
-              <a:rPr b="0" lang="en-US" sz="1800" spc="-1" strike="noStrike">
-                <a:latin typeface="Arial"/>
-              </a:rPr>
-              <a:t>t </a:t>
-            </a:r>
-            <a:r>
-              <a:rPr b="0" lang="en-US" sz="1800" spc="-1" strike="noStrike">
-                <a:latin typeface="Arial"/>
-              </a:rPr>
-              <a:t>for</a:t>
-            </a:r>
-            <a:r>
-              <a:rPr b="0" lang="en-US" sz="1800" spc="-1" strike="noStrike">
-                <a:latin typeface="Arial"/>
-              </a:rPr>
-              <a:t>m</a:t>
-            </a:r>
-            <a:r>
-              <a:rPr b="0" lang="en-US" sz="1800" spc="-1" strike="noStrike">
-                <a:latin typeface="Arial"/>
-              </a:rPr>
-              <a:t>at</a:t>
+              <a:t>Seventh Outline Level</a:t>
             </a:r>
             <a:endParaRPr b="0" lang="en-US" sz="1800" spc="-1" strike="noStrike">
               <a:latin typeface="Arial"/>
@@ -2993,7 +3092,7 @@
       </p:sp>
       <p:sp>
         <p:nvSpPr>
-          <p:cNvPr id="1" name="PlaceHolder 2"/>
+          <p:cNvPr id="2" name="PlaceHolder 3"/>
           <p:cNvSpPr>
             <a:spLocks noGrp="1"/>
           </p:cNvSpPr>
@@ -3004,7 +3103,7 @@
         <p:spPr>
           <a:xfrm>
             <a:off x="3029040" y="4767120"/>
-            <a:ext cx="3085560" cy="273240"/>
+            <a:ext cx="3085200" cy="272880"/>
           </a:xfrm>
           <a:prstGeom prst="rect">
             <a:avLst/>
@@ -3050,7 +3149,7 @@
       </p:sp>
       <p:sp>
         <p:nvSpPr>
-          <p:cNvPr id="2" name="PlaceHolder 3"/>
+          <p:cNvPr id="3" name="PlaceHolder 4"/>
           <p:cNvSpPr>
             <a:spLocks noGrp="1"/>
           </p:cNvSpPr>
@@ -3061,7 +3160,7 @@
         <p:spPr>
           <a:xfrm>
             <a:off x="6458040" y="4767120"/>
-            <a:ext cx="2056680" cy="273240"/>
+            <a:ext cx="2056320" cy="272880"/>
           </a:xfrm>
           <a:prstGeom prst="rect">
             <a:avLst/>
@@ -3096,7 +3195,7 @@
               </a:lnSpc>
               <a:buNone/>
             </a:pPr>
-            <a:fld id="{B4B0621F-D2A1-4645-A05F-2841EC94C581}" type="slidenum">
+            <a:fld id="{BFA985BD-5276-4AA1-BE52-AC5A93D7A96F}" type="slidenum">
               <a:rPr b="0" lang="en-US" sz="900" spc="-1" strike="noStrike">
                 <a:solidFill>
                   <a:srgbClr val="8b8b8b"/>
@@ -3113,7 +3212,7 @@
       </p:sp>
       <p:sp>
         <p:nvSpPr>
-          <p:cNvPr id="3" name="PlaceHolder 4"/>
+          <p:cNvPr id="4" name="PlaceHolder 5"/>
           <p:cNvSpPr>
             <a:spLocks noGrp="1"/>
           </p:cNvSpPr>
@@ -3124,7 +3223,7 @@
         <p:spPr>
           <a:xfrm>
             <a:off x="628560" y="4767120"/>
-            <a:ext cx="2056680" cy="273240"/>
+            <a:ext cx="2056320" cy="272880"/>
           </a:xfrm>
           <a:prstGeom prst="rect">
             <a:avLst/>
@@ -3154,189 +3253,6 @@
             </a:r>
             <a:endParaRPr b="0" lang="en-US" sz="1400" spc="-1" strike="noStrike">
               <a:latin typeface="Times New Roman"/>
-            </a:endParaRPr>
-          </a:p>
-        </p:txBody>
-      </p:sp>
-      <p:sp>
-        <p:nvSpPr>
-          <p:cNvPr id="4" name="PlaceHolder 5"/>
-          <p:cNvSpPr>
-            <a:spLocks noGrp="1"/>
-          </p:cNvSpPr>
-          <p:nvPr>
-            <p:ph type="body"/>
-          </p:nvPr>
-        </p:nvSpPr>
-        <p:spPr>
-          <a:xfrm>
-            <a:off x="457200" y="1203480"/>
-            <a:ext cx="8229240" cy="2982960"/>
-          </a:xfrm>
-          <a:prstGeom prst="rect">
-            <a:avLst/>
-          </a:prstGeom>
-          <a:noFill/>
-          <a:ln w="0">
-            <a:noFill/>
-          </a:ln>
-        </p:spPr>
-        <p:txBody>
-          <a:bodyPr lIns="0" rIns="0" tIns="0" bIns="0" anchor="t">
-            <a:normAutofit/>
-          </a:bodyPr>
-          <a:p>
-            <a:pPr marL="432000" indent="-324000">
-              <a:spcBef>
-                <a:spcPts val="1417"/>
-              </a:spcBef>
-              <a:buClr>
-                <a:srgbClr val="000000"/>
-              </a:buClr>
-              <a:buSzPct val="45000"/>
-              <a:buFont typeface="Wingdings" charset="2"/>
-              <a:buChar char=""/>
-            </a:pPr>
-            <a:r>
-              <a:rPr b="0" lang="en-US" sz="3200" spc="-1" strike="noStrike">
-                <a:latin typeface="Arial"/>
-              </a:rPr>
-              <a:t>Click to edit the outline text format</a:t>
-            </a:r>
-            <a:endParaRPr b="0" lang="en-US" sz="3200" spc="-1" strike="noStrike">
-              <a:latin typeface="Arial"/>
-            </a:endParaRPr>
-          </a:p>
-          <a:p>
-            <a:pPr lvl="1" marL="864000" indent="-324000">
-              <a:spcBef>
-                <a:spcPts val="1134"/>
-              </a:spcBef>
-              <a:buClr>
-                <a:srgbClr val="000000"/>
-              </a:buClr>
-              <a:buSzPct val="75000"/>
-              <a:buFont typeface="Symbol" charset="2"/>
-              <a:buChar char=""/>
-            </a:pPr>
-            <a:r>
-              <a:rPr b="0" lang="en-US" sz="2800" spc="-1" strike="noStrike">
-                <a:latin typeface="Arial"/>
-              </a:rPr>
-              <a:t>Second Outline Level</a:t>
-            </a:r>
-            <a:endParaRPr b="0" lang="en-US" sz="2800" spc="-1" strike="noStrike">
-              <a:latin typeface="Arial"/>
-            </a:endParaRPr>
-          </a:p>
-          <a:p>
-            <a:pPr lvl="2" marL="1296000" indent="-288000">
-              <a:spcBef>
-                <a:spcPts val="850"/>
-              </a:spcBef>
-              <a:buClr>
-                <a:srgbClr val="000000"/>
-              </a:buClr>
-              <a:buSzPct val="45000"/>
-              <a:buFont typeface="Wingdings" charset="2"/>
-              <a:buChar char=""/>
-            </a:pPr>
-            <a:r>
-              <a:rPr b="0" lang="en-US" sz="2400" spc="-1" strike="noStrike">
-                <a:latin typeface="Arial"/>
-              </a:rPr>
-              <a:t>Third Outline Level</a:t>
-            </a:r>
-            <a:endParaRPr b="0" lang="en-US" sz="2400" spc="-1" strike="noStrike">
-              <a:latin typeface="Arial"/>
-            </a:endParaRPr>
-          </a:p>
-          <a:p>
-            <a:pPr lvl="3" marL="1728000" indent="-216000">
-              <a:spcBef>
-                <a:spcPts val="567"/>
-              </a:spcBef>
-              <a:buClr>
-                <a:srgbClr val="000000"/>
-              </a:buClr>
-              <a:buSzPct val="75000"/>
-              <a:buFont typeface="Symbol" charset="2"/>
-              <a:buChar char=""/>
-            </a:pPr>
-            <a:r>
-              <a:rPr b="0" lang="en-US" sz="2000" spc="-1" strike="noStrike">
-                <a:latin typeface="Arial"/>
-              </a:rPr>
-              <a:t>Fourth Outline Level</a:t>
-            </a:r>
-            <a:endParaRPr b="0" lang="en-US" sz="2000" spc="-1" strike="noStrike">
-              <a:latin typeface="Arial"/>
-            </a:endParaRPr>
-          </a:p>
-          <a:p>
-            <a:pPr lvl="4" marL="2160000" indent="-216000">
-              <a:spcBef>
-                <a:spcPts val="283"/>
-              </a:spcBef>
-              <a:buClr>
-                <a:srgbClr val="000000"/>
-              </a:buClr>
-              <a:buSzPct val="45000"/>
-              <a:buFont typeface="Wingdings" charset="2"/>
-              <a:buChar char=""/>
-            </a:pPr>
-            <a:r>
-              <a:rPr b="0" lang="en-US" sz="2000" spc="-1" strike="noStrike">
-                <a:latin typeface="Arial"/>
-              </a:rPr>
-              <a:t>Fifth Outline Level</a:t>
-            </a:r>
-            <a:endParaRPr b="0" lang="en-US" sz="2000" spc="-1" strike="noStrike">
-              <a:latin typeface="Arial"/>
-            </a:endParaRPr>
-          </a:p>
-          <a:p>
-            <a:pPr lvl="5" marL="2592000" indent="-216000">
-              <a:spcBef>
-                <a:spcPts val="283"/>
-              </a:spcBef>
-              <a:buClr>
-                <a:srgbClr val="000000"/>
-              </a:buClr>
-              <a:buSzPct val="45000"/>
-              <a:buFont typeface="Wingdings" charset="2"/>
-              <a:buChar char=""/>
-            </a:pPr>
-            <a:r>
-              <a:rPr b="0" lang="en-US" sz="2000" spc="-1" strike="noStrike">
-                <a:latin typeface="Arial"/>
-              </a:rPr>
-              <a:t>Sixth Outline Level</a:t>
-            </a:r>
-            <a:endParaRPr b="0" lang="en-US" sz="2000" spc="-1" strike="noStrike">
-              <a:latin typeface="Arial"/>
-            </a:endParaRPr>
-          </a:p>
-          <a:p>
-            <a:pPr lvl="6" marL="3024000" indent="-216000">
-              <a:spcBef>
-                <a:spcPts val="283"/>
-              </a:spcBef>
-              <a:buClr>
-                <a:srgbClr val="000000"/>
-              </a:buClr>
-              <a:buSzPct val="45000"/>
-              <a:buFont typeface="Wingdings" charset="2"/>
-              <a:buChar char=""/>
-            </a:pPr>
-            <a:r>
-              <a:rPr b="0" lang="en-US" sz="2000" spc="-1" strike="noStrike">
-                <a:latin typeface="Arial"/>
-              </a:rPr>
-              <a:t>Seventh Outline Level</a:t>
-            </a:r>
-            <a:endParaRPr b="0" lang="en-US" sz="2000" spc="-1" strike="noStrike">
-              <a:latin typeface="Arial"/>
             </a:endParaRPr>
           </a:p>
         </p:txBody>
@@ -3387,7 +3303,7 @@
         <p:spPr>
           <a:xfrm>
             <a:off x="186840" y="178200"/>
-            <a:ext cx="8769960" cy="4757760"/>
+            <a:ext cx="8769600" cy="4757400"/>
           </a:xfrm>
           <a:prstGeom prst="roundRect">
             <a:avLst>
@@ -3425,7 +3341,7 @@
         <p:spPr>
           <a:xfrm>
             <a:off x="460080" y="622080"/>
-            <a:ext cx="6925680" cy="3306600"/>
+            <a:ext cx="6925320" cy="3306240"/>
           </a:xfrm>
           <a:prstGeom prst="rect">
             <a:avLst/>
@@ -3481,7 +3397,7 @@
         <p:spPr>
           <a:xfrm>
             <a:off x="5753880" y="2557440"/>
-            <a:ext cx="4009680" cy="3133080"/>
+            <a:ext cx="4009320" cy="3132720"/>
           </a:xfrm>
           <a:prstGeom prst="rect">
             <a:avLst/>
@@ -3534,7 +3450,7 @@
         <p:spPr>
           <a:xfrm>
             <a:off x="5753880" y="2557440"/>
-            <a:ext cx="4009680" cy="3133080"/>
+            <a:ext cx="4009320" cy="3132720"/>
           </a:xfrm>
           <a:prstGeom prst="rect">
             <a:avLst/>
@@ -3553,7 +3469,7 @@
         <p:spPr>
           <a:xfrm>
             <a:off x="185760" y="831240"/>
-            <a:ext cx="899280" cy="899280"/>
+            <a:ext cx="898920" cy="898920"/>
           </a:xfrm>
           <a:prstGeom prst="ellipse">
             <a:avLst/>
@@ -3613,7 +3529,7 @@
         <p:spPr>
           <a:xfrm>
             <a:off x="185760" y="2381400"/>
-            <a:ext cx="899280" cy="887400"/>
+            <a:ext cx="898920" cy="887040"/>
           </a:xfrm>
           <a:prstGeom prst="ellipse">
             <a:avLst/>
@@ -3673,7 +3589,7 @@
         <p:spPr>
           <a:xfrm>
             <a:off x="185760" y="3860640"/>
-            <a:ext cx="899280" cy="899280"/>
+            <a:ext cx="898920" cy="898920"/>
           </a:xfrm>
           <a:prstGeom prst="ellipse">
             <a:avLst/>
@@ -3733,7 +3649,7 @@
         <p:spPr>
           <a:xfrm>
             <a:off x="967680" y="797040"/>
-            <a:ext cx="3764520" cy="550440"/>
+            <a:ext cx="3764160" cy="550080"/>
           </a:xfrm>
           <a:prstGeom prst="rect">
             <a:avLst/>
@@ -3795,7 +3711,7 @@
         <p:spPr>
           <a:xfrm>
             <a:off x="967680" y="1332720"/>
-            <a:ext cx="3764520" cy="789480"/>
+            <a:ext cx="3764160" cy="789120"/>
           </a:xfrm>
           <a:prstGeom prst="rect">
             <a:avLst/>
@@ -3857,7 +3773,7 @@
         <p:spPr>
           <a:xfrm>
             <a:off x="964080" y="2292480"/>
-            <a:ext cx="3764520" cy="550440"/>
+            <a:ext cx="3764160" cy="550080"/>
           </a:xfrm>
           <a:prstGeom prst="rect">
             <a:avLst/>
@@ -3909,7 +3825,7 @@
         <p:spPr>
           <a:xfrm>
             <a:off x="964080" y="2825280"/>
-            <a:ext cx="3764520" cy="843120"/>
+            <a:ext cx="3764160" cy="842760"/>
           </a:xfrm>
           <a:prstGeom prst="rect">
             <a:avLst/>
@@ -3971,7 +3887,7 @@
         <p:spPr>
           <a:xfrm>
             <a:off x="964080" y="3777840"/>
-            <a:ext cx="3764520" cy="550440"/>
+            <a:ext cx="3764160" cy="550080"/>
           </a:xfrm>
           <a:prstGeom prst="rect">
             <a:avLst/>
@@ -4023,7 +3939,7 @@
         <p:spPr>
           <a:xfrm>
             <a:off x="964080" y="4310640"/>
-            <a:ext cx="3764520" cy="794520"/>
+            <a:ext cx="3764160" cy="794160"/>
           </a:xfrm>
           <a:prstGeom prst="rect">
             <a:avLst/>
@@ -4085,7 +4001,7 @@
         <p:spPr>
           <a:xfrm>
             <a:off x="5084640" y="987840"/>
-            <a:ext cx="3687480" cy="3496680"/>
+            <a:ext cx="3687120" cy="3496320"/>
           </a:xfrm>
           <a:prstGeom prst="roundRect">
             <a:avLst>
@@ -4149,7 +4065,7 @@
         <p:spPr>
           <a:xfrm>
             <a:off x="8519760" y="4831560"/>
-            <a:ext cx="484560" cy="226800"/>
+            <a:ext cx="484200" cy="226800"/>
           </a:xfrm>
           <a:prstGeom prst="rect">
             <a:avLst/>
@@ -4201,7 +4117,7 @@
         <p:spPr>
           <a:xfrm>
             <a:off x="421200" y="228600"/>
-            <a:ext cx="8457840" cy="685440"/>
+            <a:ext cx="8457480" cy="685080"/>
           </a:xfrm>
           <a:prstGeom prst="rect">
             <a:avLst/>
@@ -4230,7 +4146,11 @@
             </a:pPr>
             <a:r>
               <a:rPr b="0" lang="en-US" sz="1800" spc="-1" strike="noStrike">
+                <a:solidFill>
+                  <a:srgbClr val="000000"/>
+                </a:solidFill>
                 <a:latin typeface="Arial"/>
+                <a:ea typeface="DejaVu Sans"/>
               </a:rPr>
               <a:t>TITLE</a:t>
             </a:r>
@@ -4279,7 +4199,7 @@
         <p:spPr>
           <a:xfrm>
             <a:off x="506520" y="1484640"/>
-            <a:ext cx="2556720" cy="2055240"/>
+            <a:ext cx="2556360" cy="2054880"/>
           </a:xfrm>
           <a:prstGeom prst="roundRect">
             <a:avLst>
@@ -4319,7 +4239,7 @@
         <p:spPr>
           <a:xfrm>
             <a:off x="624240" y="1616760"/>
-            <a:ext cx="2289600" cy="729000"/>
+            <a:ext cx="2289240" cy="728640"/>
           </a:xfrm>
           <a:prstGeom prst="rect">
             <a:avLst/>
@@ -4371,7 +4291,7 @@
         <p:spPr>
           <a:xfrm>
             <a:off x="624240" y="2400480"/>
-            <a:ext cx="2289600" cy="1162080"/>
+            <a:ext cx="2289240" cy="1161720"/>
           </a:xfrm>
           <a:prstGeom prst="rect">
             <a:avLst/>
@@ -4433,7 +4353,7 @@
         <p:spPr>
           <a:xfrm>
             <a:off x="3309120" y="2066040"/>
-            <a:ext cx="2556720" cy="2055240"/>
+            <a:ext cx="2556360" cy="2054880"/>
           </a:xfrm>
           <a:prstGeom prst="roundRect">
             <a:avLst>
@@ -4473,7 +4393,7 @@
         <p:spPr>
           <a:xfrm>
             <a:off x="3426840" y="2198160"/>
-            <a:ext cx="2289600" cy="729000"/>
+            <a:ext cx="2289240" cy="728640"/>
           </a:xfrm>
           <a:prstGeom prst="rect">
             <a:avLst/>
@@ -4525,7 +4445,7 @@
         <p:spPr>
           <a:xfrm>
             <a:off x="3426840" y="2981880"/>
-            <a:ext cx="2289600" cy="1162080"/>
+            <a:ext cx="2289240" cy="1161720"/>
           </a:xfrm>
           <a:prstGeom prst="rect">
             <a:avLst/>
@@ -4577,7 +4497,7 @@
         <p:spPr>
           <a:xfrm>
             <a:off x="6111720" y="2659320"/>
-            <a:ext cx="2556720" cy="2055240"/>
+            <a:ext cx="2556360" cy="2054880"/>
           </a:xfrm>
           <a:prstGeom prst="roundRect">
             <a:avLst>
@@ -4617,7 +4537,7 @@
         <p:spPr>
           <a:xfrm>
             <a:off x="6229440" y="2791440"/>
-            <a:ext cx="2289600" cy="729000"/>
+            <a:ext cx="2289240" cy="728640"/>
           </a:xfrm>
           <a:prstGeom prst="rect">
             <a:avLst/>
@@ -4652,7 +4572,7 @@
                 <a:latin typeface="Arial"/>
                 <a:ea typeface="DejaVu Sans"/>
               </a:rPr>
-              <a:t>SUBTITLE2</a:t>
+              <a:t>SUBTITLE3</a:t>
             </a:r>
             <a:endParaRPr b="0" lang="en-US" sz="1400" spc="-1" strike="noStrike">
               <a:latin typeface="Arial"/>
@@ -4669,7 +4589,7 @@
         <p:spPr>
           <a:xfrm>
             <a:off x="6229440" y="3574800"/>
-            <a:ext cx="2289600" cy="1162080"/>
+            <a:ext cx="2289240" cy="1161720"/>
           </a:xfrm>
           <a:prstGeom prst="rect">
             <a:avLst/>
@@ -4704,7 +4624,7 @@
                 <a:latin typeface="Arial"/>
                 <a:ea typeface="DejaVu Sans"/>
               </a:rPr>
-              <a:t>TEXT2</a:t>
+              <a:t>TEXT3</a:t>
             </a:r>
             <a:endParaRPr b="0" lang="en-US" sz="1100" spc="-1" strike="noStrike">
               <a:latin typeface="Arial"/>
@@ -4721,7 +4641,7 @@
         <p:spPr>
           <a:xfrm>
             <a:off x="8519760" y="4831560"/>
-            <a:ext cx="484560" cy="226800"/>
+            <a:ext cx="484200" cy="226800"/>
           </a:xfrm>
           <a:prstGeom prst="rect">
             <a:avLst/>
@@ -4773,7 +4693,7 @@
         <p:spPr>
           <a:xfrm>
             <a:off x="457200" y="228600"/>
-            <a:ext cx="8229240" cy="1142640"/>
+            <a:ext cx="8228880" cy="1142280"/>
           </a:xfrm>
           <a:prstGeom prst="rect">
             <a:avLst/>
@@ -4802,7 +4722,11 @@
             </a:pPr>
             <a:r>
               <a:rPr b="0" lang="en-US" sz="1800" spc="-1" strike="noStrike">
+                <a:solidFill>
+                  <a:srgbClr val="000000"/>
+                </a:solidFill>
                 <a:latin typeface="Arial"/>
+                <a:ea typeface="DejaVu Sans"/>
               </a:rPr>
               <a:t>TITLE</a:t>
             </a:r>
@@ -4851,7 +4775,7 @@
         <p:spPr>
           <a:xfrm>
             <a:off x="3601800" y="3271680"/>
-            <a:ext cx="5236200" cy="1320840"/>
+            <a:ext cx="5235840" cy="1320480"/>
           </a:xfrm>
           <a:prstGeom prst="roundRect">
             <a:avLst>
@@ -4889,7 +4813,7 @@
         <p:spPr>
           <a:xfrm>
             <a:off x="6308640" y="1028880"/>
-            <a:ext cx="2532960" cy="2056680"/>
+            <a:ext cx="2532600" cy="2056320"/>
           </a:xfrm>
           <a:prstGeom prst="roundRect">
             <a:avLst>
@@ -4927,7 +4851,7 @@
         <p:spPr>
           <a:xfrm>
             <a:off x="3604320" y="1014480"/>
-            <a:ext cx="2532960" cy="2056680"/>
+            <a:ext cx="2532600" cy="2056320"/>
           </a:xfrm>
           <a:prstGeom prst="roundRect">
             <a:avLst>
@@ -4965,7 +4889,7 @@
         <p:spPr>
           <a:xfrm>
             <a:off x="3696480" y="1059120"/>
-            <a:ext cx="2343240" cy="713520"/>
+            <a:ext cx="2342880" cy="713160"/>
           </a:xfrm>
           <a:prstGeom prst="rect">
             <a:avLst/>
@@ -5027,7 +4951,7 @@
         <p:spPr>
           <a:xfrm>
             <a:off x="3696480" y="1843560"/>
-            <a:ext cx="2343240" cy="1141920"/>
+            <a:ext cx="2342880" cy="1141560"/>
           </a:xfrm>
           <a:prstGeom prst="rect">
             <a:avLst/>
@@ -5089,7 +5013,7 @@
         <p:spPr>
           <a:xfrm>
             <a:off x="6400080" y="1059120"/>
-            <a:ext cx="2340000" cy="713520"/>
+            <a:ext cx="2339640" cy="713160"/>
           </a:xfrm>
           <a:prstGeom prst="rect">
             <a:avLst/>
@@ -5141,7 +5065,7 @@
         <p:spPr>
           <a:xfrm>
             <a:off x="6400080" y="1843560"/>
-            <a:ext cx="2340000" cy="1141920"/>
+            <a:ext cx="2339640" cy="1141560"/>
           </a:xfrm>
           <a:prstGeom prst="rect">
             <a:avLst/>
@@ -5203,7 +5127,7 @@
         <p:spPr>
           <a:xfrm>
             <a:off x="3696480" y="3362040"/>
-            <a:ext cx="5236200" cy="328680"/>
+            <a:ext cx="5235840" cy="328320"/>
           </a:xfrm>
           <a:prstGeom prst="rect">
             <a:avLst/>
@@ -5255,7 +5179,7 @@
         <p:spPr>
           <a:xfrm>
             <a:off x="3696480" y="3713400"/>
-            <a:ext cx="5146560" cy="713520"/>
+            <a:ext cx="5146200" cy="713160"/>
           </a:xfrm>
           <a:prstGeom prst="rect">
             <a:avLst/>
@@ -5317,7 +5241,7 @@
         <p:spPr>
           <a:xfrm>
             <a:off x="384840" y="1028880"/>
-            <a:ext cx="3002400" cy="3564000"/>
+            <a:ext cx="3002040" cy="3563640"/>
           </a:xfrm>
           <a:prstGeom prst="roundRect">
             <a:avLst>
@@ -5381,7 +5305,7 @@
         <p:spPr>
           <a:xfrm>
             <a:off x="8519760" y="4831560"/>
-            <a:ext cx="484560" cy="226800"/>
+            <a:ext cx="484200" cy="226800"/>
           </a:xfrm>
           <a:prstGeom prst="rect">
             <a:avLst/>
@@ -5433,7 +5357,7 @@
         <p:spPr>
           <a:xfrm>
             <a:off x="313200" y="228600"/>
-            <a:ext cx="8457840" cy="685440"/>
+            <a:ext cx="8457480" cy="685080"/>
           </a:xfrm>
           <a:prstGeom prst="rect">
             <a:avLst/>
@@ -5462,7 +5386,11 @@
             </a:pPr>
             <a:r>
               <a:rPr b="0" lang="en-US" sz="1800" spc="-1" strike="noStrike">
+                <a:solidFill>
+                  <a:srgbClr val="000000"/>
+                </a:solidFill>
                 <a:latin typeface="Arial"/>
+                <a:ea typeface="DejaVu Sans"/>
               </a:rPr>
               <a:t>TITLE</a:t>
             </a:r>
@@ -5515,7 +5443,7 @@
         <p:spPr>
           <a:xfrm>
             <a:off x="-877680" y="2245320"/>
-            <a:ext cx="4613040" cy="3604680"/>
+            <a:ext cx="4612680" cy="3604320"/>
           </a:xfrm>
           <a:prstGeom prst="rect">
             <a:avLst/>
@@ -5534,7 +5462,7 @@
         <p:spPr>
           <a:xfrm>
             <a:off x="4157640" y="631080"/>
-            <a:ext cx="899280" cy="899280"/>
+            <a:ext cx="898920" cy="898920"/>
           </a:xfrm>
           <a:prstGeom prst="ellipse">
             <a:avLst/>
@@ -5596,7 +5524,7 @@
         <p:spPr>
           <a:xfrm>
             <a:off x="4157640" y="2127600"/>
-            <a:ext cx="899280" cy="887400"/>
+            <a:ext cx="898920" cy="887040"/>
           </a:xfrm>
           <a:prstGeom prst="ellipse">
             <a:avLst/>
@@ -5658,7 +5586,7 @@
         <p:spPr>
           <a:xfrm>
             <a:off x="4157640" y="3612240"/>
-            <a:ext cx="899280" cy="899280"/>
+            <a:ext cx="898920" cy="898920"/>
           </a:xfrm>
           <a:prstGeom prst="ellipse">
             <a:avLst/>
@@ -5720,7 +5648,7 @@
         <p:spPr>
           <a:xfrm>
             <a:off x="5146560" y="489600"/>
-            <a:ext cx="3578760" cy="550440"/>
+            <a:ext cx="3578400" cy="550080"/>
           </a:xfrm>
           <a:prstGeom prst="rect">
             <a:avLst/>
@@ -5782,7 +5710,7 @@
         <p:spPr>
           <a:xfrm>
             <a:off x="5146560" y="1025280"/>
-            <a:ext cx="3578760" cy="789480"/>
+            <a:ext cx="3578400" cy="789120"/>
           </a:xfrm>
           <a:prstGeom prst="rect">
             <a:avLst/>
@@ -5844,7 +5772,7 @@
         <p:spPr>
           <a:xfrm>
             <a:off x="5142960" y="1985400"/>
-            <a:ext cx="3578760" cy="550440"/>
+            <a:ext cx="3578400" cy="550080"/>
           </a:xfrm>
           <a:prstGeom prst="rect">
             <a:avLst/>
@@ -5896,7 +5824,7 @@
         <p:spPr>
           <a:xfrm>
             <a:off x="5142960" y="2517840"/>
-            <a:ext cx="3578760" cy="843120"/>
+            <a:ext cx="3578400" cy="842760"/>
           </a:xfrm>
           <a:prstGeom prst="rect">
             <a:avLst/>
@@ -5958,7 +5886,7 @@
         <p:spPr>
           <a:xfrm>
             <a:off x="5142960" y="3470760"/>
-            <a:ext cx="3578760" cy="550440"/>
+            <a:ext cx="3578400" cy="550080"/>
           </a:xfrm>
           <a:prstGeom prst="rect">
             <a:avLst/>
@@ -6010,7 +5938,7 @@
         <p:spPr>
           <a:xfrm>
             <a:off x="5142960" y="4003560"/>
-            <a:ext cx="3578760" cy="794520"/>
+            <a:ext cx="3578400" cy="794160"/>
           </a:xfrm>
           <a:prstGeom prst="rect">
             <a:avLst/>
@@ -6072,7 +6000,7 @@
         <p:spPr>
           <a:xfrm>
             <a:off x="8519760" y="4831560"/>
-            <a:ext cx="484560" cy="226800"/>
+            <a:ext cx="484200" cy="226800"/>
           </a:xfrm>
           <a:prstGeom prst="rect">
             <a:avLst/>
@@ -6124,7 +6052,7 @@
         <p:spPr>
           <a:xfrm>
             <a:off x="264600" y="228600"/>
-            <a:ext cx="3657240" cy="2016360"/>
+            <a:ext cx="3656880" cy="2016000"/>
           </a:xfrm>
           <a:prstGeom prst="rect">
             <a:avLst/>
@@ -6153,7 +6081,11 @@
             </a:pPr>
             <a:r>
               <a:rPr b="0" lang="en-US" sz="1800" spc="-1" strike="noStrike">
+                <a:solidFill>
+                  <a:srgbClr val="000000"/>
+                </a:solidFill>
                 <a:latin typeface="Arial"/>
+                <a:ea typeface="DejaVu Sans"/>
               </a:rPr>
               <a:t>TITLE</a:t>
             </a:r>
@@ -6202,7 +6134,7 @@
         <p:spPr>
           <a:xfrm>
             <a:off x="186840" y="178200"/>
-            <a:ext cx="8769960" cy="4757760"/>
+            <a:ext cx="8769600" cy="4757400"/>
           </a:xfrm>
           <a:prstGeom prst="roundRect">
             <a:avLst>
@@ -6240,7 +6172,7 @@
         <p:spPr>
           <a:xfrm>
             <a:off x="460080" y="622080"/>
-            <a:ext cx="6925680" cy="3306600"/>
+            <a:ext cx="6925320" cy="3306240"/>
           </a:xfrm>
           <a:prstGeom prst="rect">
             <a:avLst/>
@@ -6296,7 +6228,7 @@
         <p:spPr>
           <a:xfrm>
             <a:off x="5753880" y="2557440"/>
-            <a:ext cx="4009680" cy="3133080"/>
+            <a:ext cx="4009320" cy="3132720"/>
           </a:xfrm>
           <a:prstGeom prst="rect">
             <a:avLst/>
